--- a/media/resources/files/Ekvivalenettuuluk_BOP_iREETTOO_1234_eqnqNk4.pptx
+++ b/media/resources/files/Ekvivalenettuuluk_BOP_iREETTOO_1234_eqnqNk4.pptx
@@ -10501,7 +10501,7 @@
             </a:pPr>
             <a:r>
               <a:rPr lang="ru-RU" sz="2800" dirty="0"/>
-              <a:t>Турдуу пикирлер учун ыраазычылык билдиребиз.</a:t>
+              <a:t>Түрдүү пикирлер үчүн ыраазычылык билдиребиз.</a:t>
             </a:r>
           </a:p>
           <a:p>

--- a/media/resources/files/Ekvivalenettuuluk_BOP_iREETTOO_1234_eqnqNk4.pptx
+++ b/media/resources/files/Ekvivalenettuuluk_BOP_iREETTOO_1234_eqnqNk4.pptx
@@ -1094,7 +1094,7 @@
                 </a:solidFill>
                 <a:latin typeface="Calibri" panose="020F0502020204030204"/>
               </a:rPr>
-              <a:t>Бөлчөктөрдү, ондуктарды жана пайыздарды иреттөө – 1234</a:t>
+              <a:t>Бөлчөктөрдү, ондуктарды жана пайыздарды ирээттөө – 1234</a:t>
             </a:r>
             <a:endParaRPr kumimoji="0" lang="ru-RU" sz="2800" b="0" i="0" u="none" strike="noStrike" kern="1200" cap="none" spc="0" normalizeH="0" baseline="0" noProof="0" dirty="0">
               <a:ln>
